--- a/PARADISE_presentatie/PARADISE_planning_sep-nov.pptx
+++ b/PARADISE_presentatie/PARADISE_planning_sep-nov.pptx
@@ -9540,7 +9540,7 @@
               </a:lnSpc>
             </a:pPr>
             <a:r>
-              <a:rPr sz="2700" b="1">
+              <a:rPr sz="2050" b="1">
                 <a:solidFill>
                   <a:srgbClr val="F2F8FC"/>
                 </a:solidFill>
@@ -9872,7 +9872,7 @@
               </a:lnSpc>
             </a:pPr>
             <a:r>
-              <a:rPr sz="2700" b="1">
+              <a:rPr sz="2050" b="1">
                 <a:solidFill>
                   <a:srgbClr val="F2F8FC"/>
                 </a:solidFill>
@@ -10204,7 +10204,7 @@
               </a:lnSpc>
             </a:pPr>
             <a:r>
-              <a:rPr sz="2700" b="1">
+              <a:rPr sz="2050" b="1">
                 <a:solidFill>
                   <a:srgbClr val="F2F8FC"/>
                 </a:solidFill>
@@ -10536,7 +10536,7 @@
               </a:lnSpc>
             </a:pPr>
             <a:r>
-              <a:rPr sz="2700" b="1">
+              <a:rPr sz="2050" b="1">
                 <a:solidFill>
                   <a:srgbClr val="F2F8FC"/>
                 </a:solidFill>
@@ -15397,7 +15397,7 @@
         <p:spPr>
           <a:xfrm>
             <a:off x="634984" y="2031949"/>
-            <a:ext cx="5384538" cy="4241693"/>
+            <a:ext cx="5384538" cy="4419489"/>
           </a:xfrm>
           <a:prstGeom prst="roundRect">
             <a:avLst>
@@ -15685,7 +15685,7 @@
         <p:spPr>
           <a:xfrm>
             <a:off x="6171918" y="2031949"/>
-            <a:ext cx="5384538" cy="4241693"/>
+            <a:ext cx="5384538" cy="4419489"/>
           </a:xfrm>
           <a:prstGeom prst="roundRect">
             <a:avLst>
